--- a/slides/decks/L08-fewshot.pptx
+++ b/slides/decks/L08-fewshot.pptx
@@ -119,13 +119,13 @@
   <p:extLst>
     <p:ext uri="{521415D9-36F7-43E2-AB2F-B90AF26B5E84}">
       <p14:sectionLst xmlns:p14="http://schemas.microsoft.com/office/powerpoint/2010/main">
-        <p14:section name="开场" id="{f63f9319-4997-39d7-683e-dcc2bbe118b6}">
+        <p14:section name="开场" id="{f75136f9-dc14-0871-8055-e80f5e0a9ee0}">
           <p14:sldIdLst>
             <p14:sldId id="256"/>
             <p14:sldId id="257"/>
           </p14:sldIdLst>
         </p14:section>
-        <p14:section name="讲解" id="{f0a248d5-1dd5-5b68-4c1e-a732446785fb}">
+        <p14:section name="讲解" id="{5cf16a2e-6634-b41a-e570-40eb83e15104}">
           <p14:sldIdLst>
             <p14:sldId id="258"/>
             <p14:sldId id="259"/>
@@ -137,13 +137,13 @@
             <p14:sldId id="265"/>
           </p14:sldIdLst>
         </p14:section>
-        <p14:section name="练习" id="{0af28e9b-2f47-0cf7-8d1a-3b34a7e1c401}">
+        <p14:section name="练习" id="{73aa3673-f11c-3bd0-be0b-0799a5737f14}">
           <p14:sldIdLst>
             <p14:sldId id="266"/>
             <p14:sldId id="267"/>
           </p14:sldIdLst>
         </p14:section>
-        <p14:section name="收束" id="{b07d4129-533d-db63-e9db-8b35c83b21e6}">
+        <p14:section name="收束" id="{9b7187b6-343a-41c2-8e06-8fa8e2556be4}">
           <p14:sldIdLst>
             <p14:sldId id="268"/>
           </p14:sldIdLst>
